--- a/Thesis_Documentation/Presentaion_slides/2031023.pptx
+++ b/Thesis_Documentation/Presentaion_slides/2031023.pptx
@@ -5304,13 +5304,13 @@
   <p:clrMapOvr>
     <a:masterClrMapping/>
   </p:clrMapOvr>
-  <mc:AlternateContent xmlns:mc="http://schemas.openxmlformats.org/markup-compatibility/2006">
-    <mc:Choice xmlns:p159="http://schemas.microsoft.com/office/powerpoint/2015/09/main" Requires="p159">
+  <mc:AlternateContent xmlns:mc="http://schemas.openxmlformats.org/markup-compatibility/2006" xmlns:p159="http://schemas.microsoft.com/office/powerpoint/2015/09/main">
+    <mc:Choice Requires="p159">
       <p:transition spd="slow">
         <p159:morph option="byObject"/>
       </p:transition>
     </mc:Choice>
-    <mc:Fallback>
+    <mc:Fallback xmlns="">
       <p:transition spd="slow">
         <p:fade/>
       </p:transition>
@@ -6176,13 +6176,13 @@
   <p:clrMapOvr>
     <a:masterClrMapping/>
   </p:clrMapOvr>
-  <mc:AlternateContent xmlns:mc="http://schemas.openxmlformats.org/markup-compatibility/2006">
-    <mc:Choice xmlns:p159="http://schemas.microsoft.com/office/powerpoint/2015/09/main" Requires="p159">
+  <mc:AlternateContent xmlns:mc="http://schemas.openxmlformats.org/markup-compatibility/2006" xmlns:p159="http://schemas.microsoft.com/office/powerpoint/2015/09/main">
+    <mc:Choice Requires="p159">
       <p:transition spd="slow">
         <p159:morph option="byObject"/>
       </p:transition>
     </mc:Choice>
-    <mc:Fallback>
+    <mc:Fallback xmlns="">
       <p:transition spd="slow">
         <p:fade/>
       </p:transition>
@@ -7377,1849 +7377,6 @@
       </p:sp>
       <p:grpSp>
         <p:nvGrpSpPr>
-          <p:cNvPr id="3" name="Group 3"/>
-          <p:cNvGrpSpPr/>
-          <p:nvPr/>
-        </p:nvGrpSpPr>
-        <p:grpSpPr>
-          <a:xfrm>
-            <a:off x="1535354" y="3996158"/>
-            <a:ext cx="15217292" cy="5837082"/>
-            <a:chOff x="0" y="0"/>
-            <a:chExt cx="20289723" cy="7782777"/>
-          </a:xfrm>
-        </p:grpSpPr>
-        <p:grpSp>
-          <p:nvGrpSpPr>
-            <p:cNvPr id="4" name="Group 4"/>
-            <p:cNvGrpSpPr/>
-            <p:nvPr/>
-          </p:nvGrpSpPr>
-          <p:grpSpPr>
-            <a:xfrm>
-              <a:off x="5138580" y="134272"/>
-              <a:ext cx="743230" cy="62402"/>
-              <a:chOff x="0" y="0"/>
-              <a:chExt cx="332740" cy="27940"/>
-            </a:xfrm>
-          </p:grpSpPr>
-          <p:sp>
-            <p:nvSpPr>
-              <p:cNvPr id="5" name="Freeform 5"/>
-              <p:cNvSpPr/>
-              <p:nvPr/>
-            </p:nvSpPr>
-            <p:spPr>
-              <a:xfrm>
-                <a:off x="0" y="0"/>
-                <a:ext cx="332740" cy="27940"/>
-              </a:xfrm>
-              <a:custGeom>
-                <a:avLst/>
-                <a:gdLst/>
-                <a:ahLst/>
-                <a:cxnLst/>
-                <a:rect l="l" t="t" r="r" b="b"/>
-                <a:pathLst>
-                  <a:path w="332740" h="27940">
-                    <a:moveTo>
-                      <a:pt x="13970" y="0"/>
-                    </a:moveTo>
-                    <a:lnTo>
-                      <a:pt x="166370" y="0"/>
-                    </a:lnTo>
-                    <a:lnTo>
-                      <a:pt x="166370" y="13970"/>
-                    </a:lnTo>
-                    <a:lnTo>
-                      <a:pt x="166370" y="0"/>
-                    </a:lnTo>
-                    <a:lnTo>
-                      <a:pt x="318770" y="0"/>
-                    </a:lnTo>
-                    <a:lnTo>
-                      <a:pt x="332740" y="0"/>
-                    </a:lnTo>
-                    <a:lnTo>
-                      <a:pt x="332740" y="27940"/>
-                    </a:lnTo>
-                    <a:lnTo>
-                      <a:pt x="318770" y="27940"/>
-                    </a:lnTo>
-                    <a:lnTo>
-                      <a:pt x="166370" y="27940"/>
-                    </a:lnTo>
-                    <a:lnTo>
-                      <a:pt x="13970" y="27940"/>
-                    </a:lnTo>
-                    <a:lnTo>
-                      <a:pt x="0" y="27940"/>
-                    </a:lnTo>
-                    <a:lnTo>
-                      <a:pt x="0" y="0"/>
-                    </a:lnTo>
-                    <a:close/>
-                  </a:path>
-                </a:pathLst>
-              </a:custGeom>
-              <a:solidFill>
-                <a:srgbClr val="D11A1A"/>
-              </a:solidFill>
-            </p:spPr>
-          </p:sp>
-        </p:grpSp>
-        <p:sp>
-          <p:nvSpPr>
-            <p:cNvPr id="6" name="Freeform 6"/>
-            <p:cNvSpPr/>
-            <p:nvPr/>
-          </p:nvSpPr>
-          <p:spPr>
-            <a:xfrm>
-              <a:off x="903639" y="1118281"/>
-              <a:ext cx="5270841" cy="5847311"/>
-            </a:xfrm>
-            <a:custGeom>
-              <a:avLst/>
-              <a:gdLst/>
-              <a:ahLst/>
-              <a:cxnLst/>
-              <a:rect l="l" t="t" r="r" b="b"/>
-              <a:pathLst>
-                <a:path w="5270841" h="5847311">
-                  <a:moveTo>
-                    <a:pt x="0" y="0"/>
-                  </a:moveTo>
-                  <a:lnTo>
-                    <a:pt x="5270841" y="0"/>
-                  </a:lnTo>
-                  <a:lnTo>
-                    <a:pt x="5270841" y="5847311"/>
-                  </a:lnTo>
-                  <a:lnTo>
-                    <a:pt x="0" y="5847311"/>
-                  </a:lnTo>
-                  <a:lnTo>
-                    <a:pt x="0" y="0"/>
-                  </a:lnTo>
-                  <a:close/>
-                </a:path>
-              </a:pathLst>
-            </a:custGeom>
-            <a:blipFill>
-              <a:blip>
-                <a:extLst>
-                  <a:ext uri="{96DAC541-7B7A-43D3-8B79-37D633B846F1}">
-                    <asvg:svgBlip xmlns:asvg="http://schemas.microsoft.com/office/drawing/2016/SVG/main" r:embed="rId2"/>
-                  </a:ext>
-                </a:extLst>
-              </a:blip>
-              <a:stretch>
-                <a:fillRect/>
-              </a:stretch>
-            </a:blipFill>
-          </p:spPr>
-        </p:sp>
-        <p:grpSp>
-          <p:nvGrpSpPr>
-            <p:cNvPr id="7" name="Group 7"/>
-            <p:cNvGrpSpPr/>
-            <p:nvPr/>
-          </p:nvGrpSpPr>
-          <p:grpSpPr>
-            <a:xfrm>
-              <a:off x="8824347" y="134272"/>
-              <a:ext cx="743230" cy="62402"/>
-              <a:chOff x="0" y="0"/>
-              <a:chExt cx="332740" cy="27940"/>
-            </a:xfrm>
-          </p:grpSpPr>
-          <p:sp>
-            <p:nvSpPr>
-              <p:cNvPr id="8" name="Freeform 8"/>
-              <p:cNvSpPr/>
-              <p:nvPr/>
-            </p:nvSpPr>
-            <p:spPr>
-              <a:xfrm>
-                <a:off x="0" y="0"/>
-                <a:ext cx="332740" cy="27940"/>
-              </a:xfrm>
-              <a:custGeom>
-                <a:avLst/>
-                <a:gdLst/>
-                <a:ahLst/>
-                <a:cxnLst/>
-                <a:rect l="l" t="t" r="r" b="b"/>
-                <a:pathLst>
-                  <a:path w="332740" h="27940">
-                    <a:moveTo>
-                      <a:pt x="13970" y="0"/>
-                    </a:moveTo>
-                    <a:lnTo>
-                      <a:pt x="166370" y="0"/>
-                    </a:lnTo>
-                    <a:lnTo>
-                      <a:pt x="166370" y="13970"/>
-                    </a:lnTo>
-                    <a:lnTo>
-                      <a:pt x="166370" y="0"/>
-                    </a:lnTo>
-                    <a:lnTo>
-                      <a:pt x="318770" y="0"/>
-                    </a:lnTo>
-                    <a:lnTo>
-                      <a:pt x="332740" y="0"/>
-                    </a:lnTo>
-                    <a:lnTo>
-                      <a:pt x="332740" y="27940"/>
-                    </a:lnTo>
-                    <a:lnTo>
-                      <a:pt x="318770" y="27940"/>
-                    </a:lnTo>
-                    <a:lnTo>
-                      <a:pt x="166370" y="27940"/>
-                    </a:lnTo>
-                    <a:lnTo>
-                      <a:pt x="13970" y="27940"/>
-                    </a:lnTo>
-                    <a:lnTo>
-                      <a:pt x="0" y="27940"/>
-                    </a:lnTo>
-                    <a:lnTo>
-                      <a:pt x="0" y="0"/>
-                    </a:lnTo>
-                    <a:close/>
-                  </a:path>
-                </a:pathLst>
-              </a:custGeom>
-              <a:solidFill>
-                <a:srgbClr val="1257A8"/>
-              </a:solidFill>
-            </p:spPr>
-          </p:sp>
-        </p:grpSp>
-        <p:grpSp>
-          <p:nvGrpSpPr>
-            <p:cNvPr id="9" name="Group 9"/>
-            <p:cNvGrpSpPr/>
-            <p:nvPr/>
-          </p:nvGrpSpPr>
-          <p:grpSpPr>
-            <a:xfrm>
-              <a:off x="12418820" y="134272"/>
-              <a:ext cx="743230" cy="62402"/>
-              <a:chOff x="0" y="0"/>
-              <a:chExt cx="332740" cy="27940"/>
-            </a:xfrm>
-          </p:grpSpPr>
-          <p:sp>
-            <p:nvSpPr>
-              <p:cNvPr id="10" name="Freeform 10"/>
-              <p:cNvSpPr/>
-              <p:nvPr/>
-            </p:nvSpPr>
-            <p:spPr>
-              <a:xfrm>
-                <a:off x="0" y="0"/>
-                <a:ext cx="332740" cy="27940"/>
-              </a:xfrm>
-              <a:custGeom>
-                <a:avLst/>
-                <a:gdLst/>
-                <a:ahLst/>
-                <a:cxnLst/>
-                <a:rect l="l" t="t" r="r" b="b"/>
-                <a:pathLst>
-                  <a:path w="332740" h="27940">
-                    <a:moveTo>
-                      <a:pt x="13970" y="0"/>
-                    </a:moveTo>
-                    <a:lnTo>
-                      <a:pt x="166370" y="0"/>
-                    </a:lnTo>
-                    <a:lnTo>
-                      <a:pt x="166370" y="13970"/>
-                    </a:lnTo>
-                    <a:lnTo>
-                      <a:pt x="166370" y="0"/>
-                    </a:lnTo>
-                    <a:lnTo>
-                      <a:pt x="318770" y="0"/>
-                    </a:lnTo>
-                    <a:lnTo>
-                      <a:pt x="332740" y="0"/>
-                    </a:lnTo>
-                    <a:lnTo>
-                      <a:pt x="332740" y="27940"/>
-                    </a:lnTo>
-                    <a:lnTo>
-                      <a:pt x="318770" y="27940"/>
-                    </a:lnTo>
-                    <a:lnTo>
-                      <a:pt x="166370" y="27940"/>
-                    </a:lnTo>
-                    <a:lnTo>
-                      <a:pt x="13970" y="27940"/>
-                    </a:lnTo>
-                    <a:lnTo>
-                      <a:pt x="0" y="27940"/>
-                    </a:lnTo>
-                    <a:lnTo>
-                      <a:pt x="0" y="0"/>
-                    </a:lnTo>
-                    <a:close/>
-                  </a:path>
-                </a:pathLst>
-              </a:custGeom>
-              <a:solidFill>
-                <a:srgbClr val="17803D"/>
-              </a:solidFill>
-            </p:spPr>
-          </p:sp>
-        </p:grpSp>
-        <p:sp>
-          <p:nvSpPr>
-            <p:cNvPr id="11" name="Freeform 11"/>
-            <p:cNvSpPr/>
-            <p:nvPr/>
-          </p:nvSpPr>
-          <p:spPr>
-            <a:xfrm>
-              <a:off x="7997467" y="1118281"/>
-              <a:ext cx="5270841" cy="5847311"/>
-            </a:xfrm>
-            <a:custGeom>
-              <a:avLst/>
-              <a:gdLst/>
-              <a:ahLst/>
-              <a:cxnLst/>
-              <a:rect l="l" t="t" r="r" b="b"/>
-              <a:pathLst>
-                <a:path w="5270841" h="5847311">
-                  <a:moveTo>
-                    <a:pt x="0" y="0"/>
-                  </a:moveTo>
-                  <a:lnTo>
-                    <a:pt x="5270841" y="0"/>
-                  </a:lnTo>
-                  <a:lnTo>
-                    <a:pt x="5270841" y="5847311"/>
-                  </a:lnTo>
-                  <a:lnTo>
-                    <a:pt x="0" y="5847311"/>
-                  </a:lnTo>
-                  <a:lnTo>
-                    <a:pt x="0" y="0"/>
-                  </a:lnTo>
-                  <a:close/>
-                </a:path>
-              </a:pathLst>
-            </a:custGeom>
-            <a:blipFill>
-              <a:blip>
-                <a:extLst>
-                  <a:ext uri="{96DAC541-7B7A-43D3-8B79-37D633B846F1}">
-                    <asvg:svgBlip xmlns:asvg="http://schemas.microsoft.com/office/drawing/2016/SVG/main" r:embed="rId3"/>
-                  </a:ext>
-                </a:extLst>
-              </a:blip>
-              <a:stretch>
-                <a:fillRect/>
-              </a:stretch>
-            </a:blipFill>
-          </p:spPr>
-        </p:sp>
-        <p:sp>
-          <p:nvSpPr>
-            <p:cNvPr id="12" name="Freeform 12"/>
-            <p:cNvSpPr/>
-            <p:nvPr/>
-          </p:nvSpPr>
-          <p:spPr>
-            <a:xfrm>
-              <a:off x="15018882" y="1118281"/>
-              <a:ext cx="5270841" cy="5847311"/>
-            </a:xfrm>
-            <a:custGeom>
-              <a:avLst/>
-              <a:gdLst/>
-              <a:ahLst/>
-              <a:cxnLst/>
-              <a:rect l="l" t="t" r="r" b="b"/>
-              <a:pathLst>
-                <a:path w="5270841" h="5847311">
-                  <a:moveTo>
-                    <a:pt x="0" y="0"/>
-                  </a:moveTo>
-                  <a:lnTo>
-                    <a:pt x="5270841" y="0"/>
-                  </a:lnTo>
-                  <a:lnTo>
-                    <a:pt x="5270841" y="5847311"/>
-                  </a:lnTo>
-                  <a:lnTo>
-                    <a:pt x="0" y="5847311"/>
-                  </a:lnTo>
-                  <a:lnTo>
-                    <a:pt x="0" y="0"/>
-                  </a:lnTo>
-                  <a:close/>
-                </a:path>
-              </a:pathLst>
-            </a:custGeom>
-            <a:blipFill>
-              <a:blip>
-                <a:extLst>
-                  <a:ext uri="{96DAC541-7B7A-43D3-8B79-37D633B846F1}">
-                    <asvg:svgBlip xmlns:asvg="http://schemas.microsoft.com/office/drawing/2016/SVG/main" r:embed="rId4"/>
-                  </a:ext>
-                </a:extLst>
-              </a:blip>
-              <a:stretch>
-                <a:fillRect/>
-              </a:stretch>
-            </a:blipFill>
-          </p:spPr>
-        </p:sp>
-        <p:sp>
-          <p:nvSpPr>
-            <p:cNvPr id="13" name="TextBox 13"/>
-            <p:cNvSpPr txBox="1"/>
-            <p:nvPr/>
-          </p:nvSpPr>
-          <p:spPr>
-            <a:xfrm>
-              <a:off x="502951" y="1587368"/>
-              <a:ext cx="452112" cy="474604"/>
-            </a:xfrm>
-            <a:prstGeom prst="rect">
-              <a:avLst/>
-            </a:prstGeom>
-          </p:spPr>
-          <p:txBody>
-            <a:bodyPr lIns="0" tIns="0" rIns="0" bIns="0" rtlCol="0" anchor="t">
-              <a:spAutoFit/>
-            </a:bodyPr>
-            <a:lstStyle/>
-            <a:p>
-              <a:pPr algn="l">
-                <a:lnSpc>
-                  <a:spcPts val="2931"/>
-                </a:lnSpc>
-              </a:pPr>
-              <a:r>
-                <a:rPr lang="en-US" sz="2094">
-                  <a:solidFill>
-                    <a:srgbClr val="1A1A1A"/>
-                  </a:solidFill>
-                  <a:latin typeface="Times New Roman"/>
-                  <a:ea typeface="Times New Roman"/>
-                  <a:cs typeface="Times New Roman"/>
-                  <a:sym typeface="Times New Roman"/>
-                </a:rPr>
-                <a:t>0.4</a:t>
-              </a:r>
-            </a:p>
-          </p:txBody>
-        </p:sp>
-        <p:sp>
-          <p:nvSpPr>
-            <p:cNvPr id="14" name="TextBox 14"/>
-            <p:cNvSpPr txBox="1"/>
-            <p:nvPr/>
-          </p:nvSpPr>
-          <p:spPr>
-            <a:xfrm>
-              <a:off x="502951" y="2753328"/>
-              <a:ext cx="452112" cy="474604"/>
-            </a:xfrm>
-            <a:prstGeom prst="rect">
-              <a:avLst/>
-            </a:prstGeom>
-          </p:spPr>
-          <p:txBody>
-            <a:bodyPr lIns="0" tIns="0" rIns="0" bIns="0" rtlCol="0" anchor="t">
-              <a:spAutoFit/>
-            </a:bodyPr>
-            <a:lstStyle/>
-            <a:p>
-              <a:pPr algn="l">
-                <a:lnSpc>
-                  <a:spcPts val="2931"/>
-                </a:lnSpc>
-              </a:pPr>
-              <a:r>
-                <a:rPr lang="en-US" sz="2094">
-                  <a:solidFill>
-                    <a:srgbClr val="1A1A1A"/>
-                  </a:solidFill>
-                  <a:latin typeface="Times New Roman"/>
-                  <a:ea typeface="Times New Roman"/>
-                  <a:cs typeface="Times New Roman"/>
-                  <a:sym typeface="Times New Roman"/>
-                </a:rPr>
-                <a:t>0.3</a:t>
-              </a:r>
-            </a:p>
-          </p:txBody>
-        </p:sp>
-        <p:sp>
-          <p:nvSpPr>
-            <p:cNvPr id="15" name="TextBox 15"/>
-            <p:cNvSpPr txBox="1"/>
-            <p:nvPr/>
-          </p:nvSpPr>
-          <p:spPr>
-            <a:xfrm>
-              <a:off x="502951" y="3919310"/>
-              <a:ext cx="452112" cy="474604"/>
-            </a:xfrm>
-            <a:prstGeom prst="rect">
-              <a:avLst/>
-            </a:prstGeom>
-          </p:spPr>
-          <p:txBody>
-            <a:bodyPr lIns="0" tIns="0" rIns="0" bIns="0" rtlCol="0" anchor="t">
-              <a:spAutoFit/>
-            </a:bodyPr>
-            <a:lstStyle/>
-            <a:p>
-              <a:pPr algn="l">
-                <a:lnSpc>
-                  <a:spcPts val="2931"/>
-                </a:lnSpc>
-              </a:pPr>
-              <a:r>
-                <a:rPr lang="en-US" sz="2094">
-                  <a:solidFill>
-                    <a:srgbClr val="1A1A1A"/>
-                  </a:solidFill>
-                  <a:latin typeface="Times New Roman"/>
-                  <a:ea typeface="Times New Roman"/>
-                  <a:cs typeface="Times New Roman"/>
-                  <a:sym typeface="Times New Roman"/>
-                </a:rPr>
-                <a:t>0.2</a:t>
-              </a:r>
-            </a:p>
-          </p:txBody>
-        </p:sp>
-        <p:sp>
-          <p:nvSpPr>
-            <p:cNvPr id="16" name="TextBox 16"/>
-            <p:cNvSpPr txBox="1"/>
-            <p:nvPr/>
-          </p:nvSpPr>
-          <p:spPr>
-            <a:xfrm>
-              <a:off x="502951" y="5085291"/>
-              <a:ext cx="452112" cy="474604"/>
-            </a:xfrm>
-            <a:prstGeom prst="rect">
-              <a:avLst/>
-            </a:prstGeom>
-          </p:spPr>
-          <p:txBody>
-            <a:bodyPr lIns="0" tIns="0" rIns="0" bIns="0" rtlCol="0" anchor="t">
-              <a:spAutoFit/>
-            </a:bodyPr>
-            <a:lstStyle/>
-            <a:p>
-              <a:pPr algn="l">
-                <a:lnSpc>
-                  <a:spcPts val="2931"/>
-                </a:lnSpc>
-              </a:pPr>
-              <a:r>
-                <a:rPr lang="en-US" sz="2094">
-                  <a:solidFill>
-                    <a:srgbClr val="1A1A1A"/>
-                  </a:solidFill>
-                  <a:latin typeface="Times New Roman"/>
-                  <a:ea typeface="Times New Roman"/>
-                  <a:cs typeface="Times New Roman"/>
-                  <a:sym typeface="Times New Roman"/>
-                </a:rPr>
-                <a:t>0.1</a:t>
-              </a:r>
-            </a:p>
-          </p:txBody>
-        </p:sp>
-        <p:sp>
-          <p:nvSpPr>
-            <p:cNvPr id="17" name="TextBox 17"/>
-            <p:cNvSpPr txBox="1"/>
-            <p:nvPr/>
-          </p:nvSpPr>
-          <p:spPr>
-            <a:xfrm>
-              <a:off x="502951" y="6251251"/>
-              <a:ext cx="452112" cy="474604"/>
-            </a:xfrm>
-            <a:prstGeom prst="rect">
-              <a:avLst/>
-            </a:prstGeom>
-          </p:spPr>
-          <p:txBody>
-            <a:bodyPr lIns="0" tIns="0" rIns="0" bIns="0" rtlCol="0" anchor="t">
-              <a:spAutoFit/>
-            </a:bodyPr>
-            <a:lstStyle/>
-            <a:p>
-              <a:pPr algn="l">
-                <a:lnSpc>
-                  <a:spcPts val="2931"/>
-                </a:lnSpc>
-              </a:pPr>
-              <a:r>
-                <a:rPr lang="en-US" sz="2094">
-                  <a:solidFill>
-                    <a:srgbClr val="1A1A1A"/>
-                  </a:solidFill>
-                  <a:latin typeface="Times New Roman"/>
-                  <a:ea typeface="Times New Roman"/>
-                  <a:cs typeface="Times New Roman"/>
-                  <a:sym typeface="Times New Roman"/>
-                </a:rPr>
-                <a:t>0.0</a:t>
-              </a:r>
-            </a:p>
-          </p:txBody>
-        </p:sp>
-        <p:sp>
-          <p:nvSpPr>
-            <p:cNvPr id="18" name="TextBox 18"/>
-            <p:cNvSpPr txBox="1"/>
-            <p:nvPr/>
-          </p:nvSpPr>
-          <p:spPr>
-            <a:xfrm>
-              <a:off x="1056123" y="6825593"/>
-              <a:ext cx="180845" cy="474604"/>
-            </a:xfrm>
-            <a:prstGeom prst="rect">
-              <a:avLst/>
-            </a:prstGeom>
-          </p:spPr>
-          <p:txBody>
-            <a:bodyPr lIns="0" tIns="0" rIns="0" bIns="0" rtlCol="0" anchor="t">
-              <a:spAutoFit/>
-            </a:bodyPr>
-            <a:lstStyle/>
-            <a:p>
-              <a:pPr algn="l">
-                <a:lnSpc>
-                  <a:spcPts val="2931"/>
-                </a:lnSpc>
-              </a:pPr>
-              <a:r>
-                <a:rPr lang="en-US" sz="2094">
-                  <a:solidFill>
-                    <a:srgbClr val="1A1A1A"/>
-                  </a:solidFill>
-                  <a:latin typeface="Times New Roman"/>
-                  <a:ea typeface="Times New Roman"/>
-                  <a:cs typeface="Times New Roman"/>
-                  <a:sym typeface="Times New Roman"/>
-                </a:rPr>
-                <a:t>0</a:t>
-              </a:r>
-            </a:p>
-          </p:txBody>
-        </p:sp>
-        <p:sp>
-          <p:nvSpPr>
-            <p:cNvPr id="19" name="TextBox 19"/>
-            <p:cNvSpPr txBox="1"/>
-            <p:nvPr/>
-          </p:nvSpPr>
-          <p:spPr>
-            <a:xfrm>
-              <a:off x="2502904" y="6825593"/>
-              <a:ext cx="542535" cy="474604"/>
-            </a:xfrm>
-            <a:prstGeom prst="rect">
-              <a:avLst/>
-            </a:prstGeom>
-          </p:spPr>
-          <p:txBody>
-            <a:bodyPr lIns="0" tIns="0" rIns="0" bIns="0" rtlCol="0" anchor="t">
-              <a:spAutoFit/>
-            </a:bodyPr>
-            <a:lstStyle/>
-            <a:p>
-              <a:pPr algn="l">
-                <a:lnSpc>
-                  <a:spcPts val="2931"/>
-                </a:lnSpc>
-              </a:pPr>
-              <a:r>
-                <a:rPr lang="en-US" sz="2094">
-                  <a:solidFill>
-                    <a:srgbClr val="1A1A1A"/>
-                  </a:solidFill>
-                  <a:latin typeface="Times New Roman"/>
-                  <a:ea typeface="Times New Roman"/>
-                  <a:cs typeface="Times New Roman"/>
-                  <a:sym typeface="Times New Roman"/>
-                </a:rPr>
-                <a:t>500</a:t>
-              </a:r>
-            </a:p>
-          </p:txBody>
-        </p:sp>
-        <p:sp>
-          <p:nvSpPr>
-            <p:cNvPr id="20" name="TextBox 20"/>
-            <p:cNvSpPr txBox="1"/>
-            <p:nvPr/>
-          </p:nvSpPr>
-          <p:spPr>
-            <a:xfrm>
-              <a:off x="4038341" y="6825593"/>
-              <a:ext cx="723380" cy="474604"/>
-            </a:xfrm>
-            <a:prstGeom prst="rect">
-              <a:avLst/>
-            </a:prstGeom>
-          </p:spPr>
-          <p:txBody>
-            <a:bodyPr lIns="0" tIns="0" rIns="0" bIns="0" rtlCol="0" anchor="t">
-              <a:spAutoFit/>
-            </a:bodyPr>
-            <a:lstStyle/>
-            <a:p>
-              <a:pPr algn="l">
-                <a:lnSpc>
-                  <a:spcPts val="2931"/>
-                </a:lnSpc>
-              </a:pPr>
-              <a:r>
-                <a:rPr lang="en-US" sz="2094">
-                  <a:solidFill>
-                    <a:srgbClr val="1A1A1A"/>
-                  </a:solidFill>
-                  <a:latin typeface="Times New Roman"/>
-                  <a:ea typeface="Times New Roman"/>
-                  <a:cs typeface="Times New Roman"/>
-                  <a:sym typeface="Times New Roman"/>
-                </a:rPr>
-                <a:t>1000</a:t>
-              </a:r>
-            </a:p>
-          </p:txBody>
-        </p:sp>
-        <p:sp>
-          <p:nvSpPr>
-            <p:cNvPr id="21" name="TextBox 21"/>
-            <p:cNvSpPr txBox="1"/>
-            <p:nvPr/>
-          </p:nvSpPr>
-          <p:spPr>
-            <a:xfrm>
-              <a:off x="5662434" y="6825593"/>
-              <a:ext cx="723380" cy="474604"/>
-            </a:xfrm>
-            <a:prstGeom prst="rect">
-              <a:avLst/>
-            </a:prstGeom>
-          </p:spPr>
-          <p:txBody>
-            <a:bodyPr lIns="0" tIns="0" rIns="0" bIns="0" rtlCol="0" anchor="t">
-              <a:spAutoFit/>
-            </a:bodyPr>
-            <a:lstStyle/>
-            <a:p>
-              <a:pPr algn="l">
-                <a:lnSpc>
-                  <a:spcPts val="2931"/>
-                </a:lnSpc>
-              </a:pPr>
-              <a:r>
-                <a:rPr lang="en-US" sz="2094">
-                  <a:solidFill>
-                    <a:srgbClr val="1A1A1A"/>
-                  </a:solidFill>
-                  <a:latin typeface="Times New Roman"/>
-                  <a:ea typeface="Times New Roman"/>
-                  <a:cs typeface="Times New Roman"/>
-                  <a:sym typeface="Times New Roman"/>
-                </a:rPr>
-                <a:t>1500</a:t>
-              </a:r>
-            </a:p>
-          </p:txBody>
-        </p:sp>
-        <p:sp>
-          <p:nvSpPr>
-            <p:cNvPr id="22" name="TextBox 22"/>
-            <p:cNvSpPr txBox="1"/>
-            <p:nvPr/>
-          </p:nvSpPr>
-          <p:spPr>
-            <a:xfrm>
-              <a:off x="7389609" y="1137426"/>
-              <a:ext cx="632957" cy="474604"/>
-            </a:xfrm>
-            <a:prstGeom prst="rect">
-              <a:avLst/>
-            </a:prstGeom>
-          </p:spPr>
-          <p:txBody>
-            <a:bodyPr lIns="0" tIns="0" rIns="0" bIns="0" rtlCol="0" anchor="t">
-              <a:spAutoFit/>
-            </a:bodyPr>
-            <a:lstStyle/>
-            <a:p>
-              <a:pPr algn="l">
-                <a:lnSpc>
-                  <a:spcPts val="2931"/>
-                </a:lnSpc>
-              </a:pPr>
-              <a:r>
-                <a:rPr lang="en-US" sz="2094">
-                  <a:solidFill>
-                    <a:srgbClr val="1A1A1A"/>
-                  </a:solidFill>
-                  <a:latin typeface="Times New Roman"/>
-                  <a:ea typeface="Times New Roman"/>
-                  <a:cs typeface="Times New Roman"/>
-                  <a:sym typeface="Times New Roman"/>
-                </a:rPr>
-                <a:t>0.08</a:t>
-              </a:r>
-            </a:p>
-          </p:txBody>
-        </p:sp>
-        <p:sp>
-          <p:nvSpPr>
-            <p:cNvPr id="23" name="TextBox 23"/>
-            <p:cNvSpPr txBox="1"/>
-            <p:nvPr/>
-          </p:nvSpPr>
-          <p:spPr>
-            <a:xfrm>
-              <a:off x="7389609" y="2415872"/>
-              <a:ext cx="632957" cy="474604"/>
-            </a:xfrm>
-            <a:prstGeom prst="rect">
-              <a:avLst/>
-            </a:prstGeom>
-          </p:spPr>
-          <p:txBody>
-            <a:bodyPr lIns="0" tIns="0" rIns="0" bIns="0" rtlCol="0" anchor="t">
-              <a:spAutoFit/>
-            </a:bodyPr>
-            <a:lstStyle/>
-            <a:p>
-              <a:pPr algn="l">
-                <a:lnSpc>
-                  <a:spcPts val="2931"/>
-                </a:lnSpc>
-              </a:pPr>
-              <a:r>
-                <a:rPr lang="en-US" sz="2094">
-                  <a:solidFill>
-                    <a:srgbClr val="1A1A1A"/>
-                  </a:solidFill>
-                  <a:latin typeface="Times New Roman"/>
-                  <a:ea typeface="Times New Roman"/>
-                  <a:cs typeface="Times New Roman"/>
-                  <a:sym typeface="Times New Roman"/>
-                </a:rPr>
-                <a:t>0.06</a:t>
-              </a:r>
-            </a:p>
-          </p:txBody>
-        </p:sp>
-        <p:sp>
-          <p:nvSpPr>
-            <p:cNvPr id="24" name="TextBox 24"/>
-            <p:cNvSpPr txBox="1"/>
-            <p:nvPr/>
-          </p:nvSpPr>
-          <p:spPr>
-            <a:xfrm>
-              <a:off x="7389609" y="3694339"/>
-              <a:ext cx="632957" cy="474604"/>
-            </a:xfrm>
-            <a:prstGeom prst="rect">
-              <a:avLst/>
-            </a:prstGeom>
-          </p:spPr>
-          <p:txBody>
-            <a:bodyPr lIns="0" tIns="0" rIns="0" bIns="0" rtlCol="0" anchor="t">
-              <a:spAutoFit/>
-            </a:bodyPr>
-            <a:lstStyle/>
-            <a:p>
-              <a:pPr algn="l">
-                <a:lnSpc>
-                  <a:spcPts val="2931"/>
-                </a:lnSpc>
-              </a:pPr>
-              <a:r>
-                <a:rPr lang="en-US" sz="2094">
-                  <a:solidFill>
-                    <a:srgbClr val="1A1A1A"/>
-                  </a:solidFill>
-                  <a:latin typeface="Times New Roman"/>
-                  <a:ea typeface="Times New Roman"/>
-                  <a:cs typeface="Times New Roman"/>
-                  <a:sym typeface="Times New Roman"/>
-                </a:rPr>
-                <a:t>0.04</a:t>
-              </a:r>
-            </a:p>
-          </p:txBody>
-        </p:sp>
-        <p:sp>
-          <p:nvSpPr>
-            <p:cNvPr id="25" name="TextBox 25"/>
-            <p:cNvSpPr txBox="1"/>
-            <p:nvPr/>
-          </p:nvSpPr>
-          <p:spPr>
-            <a:xfrm>
-              <a:off x="7389609" y="4972806"/>
-              <a:ext cx="632957" cy="474604"/>
-            </a:xfrm>
-            <a:prstGeom prst="rect">
-              <a:avLst/>
-            </a:prstGeom>
-          </p:spPr>
-          <p:txBody>
-            <a:bodyPr lIns="0" tIns="0" rIns="0" bIns="0" rtlCol="0" anchor="t">
-              <a:spAutoFit/>
-            </a:bodyPr>
-            <a:lstStyle/>
-            <a:p>
-              <a:pPr algn="l">
-                <a:lnSpc>
-                  <a:spcPts val="2931"/>
-                </a:lnSpc>
-              </a:pPr>
-              <a:r>
-                <a:rPr lang="en-US" sz="2094">
-                  <a:solidFill>
-                    <a:srgbClr val="1A1A1A"/>
-                  </a:solidFill>
-                  <a:latin typeface="Times New Roman"/>
-                  <a:ea typeface="Times New Roman"/>
-                  <a:cs typeface="Times New Roman"/>
-                  <a:sym typeface="Times New Roman"/>
-                </a:rPr>
-                <a:t>0.02</a:t>
-              </a:r>
-            </a:p>
-          </p:txBody>
-        </p:sp>
-        <p:sp>
-          <p:nvSpPr>
-            <p:cNvPr id="26" name="TextBox 26"/>
-            <p:cNvSpPr txBox="1"/>
-            <p:nvPr/>
-          </p:nvSpPr>
-          <p:spPr>
-            <a:xfrm>
-              <a:off x="7389609" y="6251251"/>
-              <a:ext cx="632957" cy="474604"/>
-            </a:xfrm>
-            <a:prstGeom prst="rect">
-              <a:avLst/>
-            </a:prstGeom>
-          </p:spPr>
-          <p:txBody>
-            <a:bodyPr lIns="0" tIns="0" rIns="0" bIns="0" rtlCol="0" anchor="t">
-              <a:spAutoFit/>
-            </a:bodyPr>
-            <a:lstStyle/>
-            <a:p>
-              <a:pPr algn="l">
-                <a:lnSpc>
-                  <a:spcPts val="2931"/>
-                </a:lnSpc>
-              </a:pPr>
-              <a:r>
-                <a:rPr lang="en-US" sz="2094">
-                  <a:solidFill>
-                    <a:srgbClr val="1A1A1A"/>
-                  </a:solidFill>
-                  <a:latin typeface="Times New Roman"/>
-                  <a:ea typeface="Times New Roman"/>
-                  <a:cs typeface="Times New Roman"/>
-                  <a:sym typeface="Times New Roman"/>
-                </a:rPr>
-                <a:t>0.00</a:t>
-              </a:r>
-            </a:p>
-          </p:txBody>
-        </p:sp>
-        <p:sp>
-          <p:nvSpPr>
-            <p:cNvPr id="27" name="TextBox 27"/>
-            <p:cNvSpPr txBox="1"/>
-            <p:nvPr/>
-          </p:nvSpPr>
-          <p:spPr>
-            <a:xfrm>
-              <a:off x="8120074" y="6825593"/>
-              <a:ext cx="180845" cy="474604"/>
-            </a:xfrm>
-            <a:prstGeom prst="rect">
-              <a:avLst/>
-            </a:prstGeom>
-          </p:spPr>
-          <p:txBody>
-            <a:bodyPr lIns="0" tIns="0" rIns="0" bIns="0" rtlCol="0" anchor="t">
-              <a:spAutoFit/>
-            </a:bodyPr>
-            <a:lstStyle/>
-            <a:p>
-              <a:pPr algn="l">
-                <a:lnSpc>
-                  <a:spcPts val="2931"/>
-                </a:lnSpc>
-              </a:pPr>
-              <a:r>
-                <a:rPr lang="en-US" sz="2094">
-                  <a:solidFill>
-                    <a:srgbClr val="1A1A1A"/>
-                  </a:solidFill>
-                  <a:latin typeface="Times New Roman"/>
-                  <a:ea typeface="Times New Roman"/>
-                  <a:cs typeface="Times New Roman"/>
-                  <a:sym typeface="Times New Roman"/>
-                </a:rPr>
-                <a:t>0</a:t>
-              </a:r>
-            </a:p>
-          </p:txBody>
-        </p:sp>
-        <p:sp>
-          <p:nvSpPr>
-            <p:cNvPr id="28" name="TextBox 28"/>
-            <p:cNvSpPr txBox="1"/>
-            <p:nvPr/>
-          </p:nvSpPr>
-          <p:spPr>
-            <a:xfrm>
-              <a:off x="9566875" y="6825593"/>
-              <a:ext cx="542535" cy="474604"/>
-            </a:xfrm>
-            <a:prstGeom prst="rect">
-              <a:avLst/>
-            </a:prstGeom>
-          </p:spPr>
-          <p:txBody>
-            <a:bodyPr lIns="0" tIns="0" rIns="0" bIns="0" rtlCol="0" anchor="t">
-              <a:spAutoFit/>
-            </a:bodyPr>
-            <a:lstStyle/>
-            <a:p>
-              <a:pPr algn="l">
-                <a:lnSpc>
-                  <a:spcPts val="2931"/>
-                </a:lnSpc>
-              </a:pPr>
-              <a:r>
-                <a:rPr lang="en-US" sz="2094">
-                  <a:solidFill>
-                    <a:srgbClr val="1A1A1A"/>
-                  </a:solidFill>
-                  <a:latin typeface="Times New Roman"/>
-                  <a:ea typeface="Times New Roman"/>
-                  <a:cs typeface="Times New Roman"/>
-                  <a:sym typeface="Times New Roman"/>
-                </a:rPr>
-                <a:t>500</a:t>
-              </a:r>
-            </a:p>
-          </p:txBody>
-        </p:sp>
-        <p:sp>
-          <p:nvSpPr>
-            <p:cNvPr id="29" name="TextBox 29"/>
-            <p:cNvSpPr txBox="1"/>
-            <p:nvPr/>
-          </p:nvSpPr>
-          <p:spPr>
-            <a:xfrm>
-              <a:off x="11102312" y="6825593"/>
-              <a:ext cx="723380" cy="474604"/>
-            </a:xfrm>
-            <a:prstGeom prst="rect">
-              <a:avLst/>
-            </a:prstGeom>
-          </p:spPr>
-          <p:txBody>
-            <a:bodyPr lIns="0" tIns="0" rIns="0" bIns="0" rtlCol="0" anchor="t">
-              <a:spAutoFit/>
-            </a:bodyPr>
-            <a:lstStyle/>
-            <a:p>
-              <a:pPr algn="l">
-                <a:lnSpc>
-                  <a:spcPts val="2931"/>
-                </a:lnSpc>
-              </a:pPr>
-              <a:r>
-                <a:rPr lang="en-US" sz="2094">
-                  <a:solidFill>
-                    <a:srgbClr val="1A1A1A"/>
-                  </a:solidFill>
-                  <a:latin typeface="Times New Roman"/>
-                  <a:ea typeface="Times New Roman"/>
-                  <a:cs typeface="Times New Roman"/>
-                  <a:sym typeface="Times New Roman"/>
-                </a:rPr>
-                <a:t>1000</a:t>
-              </a:r>
-            </a:p>
-          </p:txBody>
-        </p:sp>
-        <p:sp>
-          <p:nvSpPr>
-            <p:cNvPr id="30" name="TextBox 30"/>
-            <p:cNvSpPr txBox="1"/>
-            <p:nvPr/>
-          </p:nvSpPr>
-          <p:spPr>
-            <a:xfrm>
-              <a:off x="12726405" y="6825593"/>
-              <a:ext cx="723380" cy="474604"/>
-            </a:xfrm>
-            <a:prstGeom prst="rect">
-              <a:avLst/>
-            </a:prstGeom>
-          </p:spPr>
-          <p:txBody>
-            <a:bodyPr lIns="0" tIns="0" rIns="0" bIns="0" rtlCol="0" anchor="t">
-              <a:spAutoFit/>
-            </a:bodyPr>
-            <a:lstStyle/>
-            <a:p>
-              <a:pPr algn="l">
-                <a:lnSpc>
-                  <a:spcPts val="2931"/>
-                </a:lnSpc>
-              </a:pPr>
-              <a:r>
-                <a:rPr lang="en-US" sz="2094">
-                  <a:solidFill>
-                    <a:srgbClr val="1A1A1A"/>
-                  </a:solidFill>
-                  <a:latin typeface="Times New Roman"/>
-                  <a:ea typeface="Times New Roman"/>
-                  <a:cs typeface="Times New Roman"/>
-                  <a:sym typeface="Times New Roman"/>
-                </a:rPr>
-                <a:t>1500</a:t>
-              </a:r>
-            </a:p>
-          </p:txBody>
-        </p:sp>
-        <p:sp>
-          <p:nvSpPr>
-            <p:cNvPr id="31" name="TextBox 31"/>
-            <p:cNvSpPr txBox="1"/>
-            <p:nvPr/>
-          </p:nvSpPr>
-          <p:spPr>
-            <a:xfrm>
-              <a:off x="14098976" y="2134562"/>
-              <a:ext cx="994647" cy="474604"/>
-            </a:xfrm>
-            <a:prstGeom prst="rect">
-              <a:avLst/>
-            </a:prstGeom>
-          </p:spPr>
-          <p:txBody>
-            <a:bodyPr lIns="0" tIns="0" rIns="0" bIns="0" rtlCol="0" anchor="t">
-              <a:spAutoFit/>
-            </a:bodyPr>
-            <a:lstStyle/>
-            <a:p>
-              <a:pPr algn="l">
-                <a:lnSpc>
-                  <a:spcPts val="2931"/>
-                </a:lnSpc>
-              </a:pPr>
-              <a:r>
-                <a:rPr lang="en-US" sz="2094">
-                  <a:solidFill>
-                    <a:srgbClr val="1A1A1A"/>
-                  </a:solidFill>
-                  <a:latin typeface="Times New Roman"/>
-                  <a:ea typeface="Times New Roman"/>
-                  <a:cs typeface="Times New Roman"/>
-                  <a:sym typeface="Times New Roman"/>
-                </a:rPr>
-                <a:t>0.0006</a:t>
-              </a:r>
-            </a:p>
-          </p:txBody>
-        </p:sp>
-        <p:sp>
-          <p:nvSpPr>
-            <p:cNvPr id="32" name="TextBox 32"/>
-            <p:cNvSpPr txBox="1"/>
-            <p:nvPr/>
-          </p:nvSpPr>
-          <p:spPr>
-            <a:xfrm>
-              <a:off x="14098976" y="3506792"/>
-              <a:ext cx="994647" cy="474604"/>
-            </a:xfrm>
-            <a:prstGeom prst="rect">
-              <a:avLst/>
-            </a:prstGeom>
-          </p:spPr>
-          <p:txBody>
-            <a:bodyPr lIns="0" tIns="0" rIns="0" bIns="0" rtlCol="0" anchor="t">
-              <a:spAutoFit/>
-            </a:bodyPr>
-            <a:lstStyle/>
-            <a:p>
-              <a:pPr algn="l">
-                <a:lnSpc>
-                  <a:spcPts val="2931"/>
-                </a:lnSpc>
-              </a:pPr>
-              <a:r>
-                <a:rPr lang="en-US" sz="2094" dirty="0">
-                  <a:solidFill>
-                    <a:srgbClr val="1A1A1A"/>
-                  </a:solidFill>
-                  <a:latin typeface="Times New Roman"/>
-                  <a:ea typeface="Times New Roman"/>
-                  <a:cs typeface="Times New Roman"/>
-                  <a:sym typeface="Times New Roman"/>
-                </a:rPr>
-                <a:t>0.0004</a:t>
-              </a:r>
-            </a:p>
-          </p:txBody>
-        </p:sp>
-        <p:sp>
-          <p:nvSpPr>
-            <p:cNvPr id="33" name="TextBox 33"/>
-            <p:cNvSpPr txBox="1"/>
-            <p:nvPr/>
-          </p:nvSpPr>
-          <p:spPr>
-            <a:xfrm>
-              <a:off x="14098976" y="4879022"/>
-              <a:ext cx="994647" cy="474604"/>
-            </a:xfrm>
-            <a:prstGeom prst="rect">
-              <a:avLst/>
-            </a:prstGeom>
-          </p:spPr>
-          <p:txBody>
-            <a:bodyPr lIns="0" tIns="0" rIns="0" bIns="0" rtlCol="0" anchor="t">
-              <a:spAutoFit/>
-            </a:bodyPr>
-            <a:lstStyle/>
-            <a:p>
-              <a:pPr algn="l">
-                <a:lnSpc>
-                  <a:spcPts val="2931"/>
-                </a:lnSpc>
-              </a:pPr>
-              <a:r>
-                <a:rPr lang="en-US" sz="2094">
-                  <a:solidFill>
-                    <a:srgbClr val="1A1A1A"/>
-                  </a:solidFill>
-                  <a:latin typeface="Times New Roman"/>
-                  <a:ea typeface="Times New Roman"/>
-                  <a:cs typeface="Times New Roman"/>
-                  <a:sym typeface="Times New Roman"/>
-                </a:rPr>
-                <a:t>0.0002</a:t>
-              </a:r>
-            </a:p>
-          </p:txBody>
-        </p:sp>
-        <p:sp>
-          <p:nvSpPr>
-            <p:cNvPr id="34" name="TextBox 34"/>
-            <p:cNvSpPr txBox="1"/>
-            <p:nvPr/>
-          </p:nvSpPr>
-          <p:spPr>
-            <a:xfrm>
-              <a:off x="14098976" y="6251251"/>
-              <a:ext cx="994647" cy="474604"/>
-            </a:xfrm>
-            <a:prstGeom prst="rect">
-              <a:avLst/>
-            </a:prstGeom>
-          </p:spPr>
-          <p:txBody>
-            <a:bodyPr lIns="0" tIns="0" rIns="0" bIns="0" rtlCol="0" anchor="t">
-              <a:spAutoFit/>
-            </a:bodyPr>
-            <a:lstStyle/>
-            <a:p>
-              <a:pPr algn="l">
-                <a:lnSpc>
-                  <a:spcPts val="2931"/>
-                </a:lnSpc>
-              </a:pPr>
-              <a:r>
-                <a:rPr lang="en-US" sz="2094">
-                  <a:solidFill>
-                    <a:srgbClr val="1A1A1A"/>
-                  </a:solidFill>
-                  <a:latin typeface="Times New Roman"/>
-                  <a:ea typeface="Times New Roman"/>
-                  <a:cs typeface="Times New Roman"/>
-                  <a:sym typeface="Times New Roman"/>
-                </a:rPr>
-                <a:t>0.0000</a:t>
-              </a:r>
-            </a:p>
-          </p:txBody>
-        </p:sp>
-        <p:sp>
-          <p:nvSpPr>
-            <p:cNvPr id="35" name="TextBox 35"/>
-            <p:cNvSpPr txBox="1"/>
-            <p:nvPr/>
-          </p:nvSpPr>
-          <p:spPr>
-            <a:xfrm>
-              <a:off x="15184045" y="6825593"/>
-              <a:ext cx="180845" cy="474604"/>
-            </a:xfrm>
-            <a:prstGeom prst="rect">
-              <a:avLst/>
-            </a:prstGeom>
-          </p:spPr>
-          <p:txBody>
-            <a:bodyPr lIns="0" tIns="0" rIns="0" bIns="0" rtlCol="0" anchor="t">
-              <a:spAutoFit/>
-            </a:bodyPr>
-            <a:lstStyle/>
-            <a:p>
-              <a:pPr algn="l">
-                <a:lnSpc>
-                  <a:spcPts val="2931"/>
-                </a:lnSpc>
-              </a:pPr>
-              <a:r>
-                <a:rPr lang="en-US" sz="2094">
-                  <a:solidFill>
-                    <a:srgbClr val="1A1A1A"/>
-                  </a:solidFill>
-                  <a:latin typeface="Times New Roman"/>
-                  <a:ea typeface="Times New Roman"/>
-                  <a:cs typeface="Times New Roman"/>
-                  <a:sym typeface="Times New Roman"/>
-                </a:rPr>
-                <a:t>0</a:t>
-              </a:r>
-            </a:p>
-          </p:txBody>
-        </p:sp>
-        <p:sp>
-          <p:nvSpPr>
-            <p:cNvPr id="36" name="TextBox 36"/>
-            <p:cNvSpPr txBox="1"/>
-            <p:nvPr/>
-          </p:nvSpPr>
-          <p:spPr>
-            <a:xfrm>
-              <a:off x="16630846" y="6825593"/>
-              <a:ext cx="542535" cy="474604"/>
-            </a:xfrm>
-            <a:prstGeom prst="rect">
-              <a:avLst/>
-            </a:prstGeom>
-          </p:spPr>
-          <p:txBody>
-            <a:bodyPr lIns="0" tIns="0" rIns="0" bIns="0" rtlCol="0" anchor="t">
-              <a:spAutoFit/>
-            </a:bodyPr>
-            <a:lstStyle/>
-            <a:p>
-              <a:pPr algn="l">
-                <a:lnSpc>
-                  <a:spcPts val="2931"/>
-                </a:lnSpc>
-              </a:pPr>
-              <a:r>
-                <a:rPr lang="en-US" sz="2094">
-                  <a:solidFill>
-                    <a:srgbClr val="1A1A1A"/>
-                  </a:solidFill>
-                  <a:latin typeface="Times New Roman"/>
-                  <a:ea typeface="Times New Roman"/>
-                  <a:cs typeface="Times New Roman"/>
-                  <a:sym typeface="Times New Roman"/>
-                </a:rPr>
-                <a:t>500</a:t>
-              </a:r>
-            </a:p>
-          </p:txBody>
-        </p:sp>
-        <p:sp>
-          <p:nvSpPr>
-            <p:cNvPr id="37" name="TextBox 37"/>
-            <p:cNvSpPr txBox="1"/>
-            <p:nvPr/>
-          </p:nvSpPr>
-          <p:spPr>
-            <a:xfrm>
-              <a:off x="18166283" y="6825593"/>
-              <a:ext cx="723380" cy="474604"/>
-            </a:xfrm>
-            <a:prstGeom prst="rect">
-              <a:avLst/>
-            </a:prstGeom>
-          </p:spPr>
-          <p:txBody>
-            <a:bodyPr lIns="0" tIns="0" rIns="0" bIns="0" rtlCol="0" anchor="t">
-              <a:spAutoFit/>
-            </a:bodyPr>
-            <a:lstStyle/>
-            <a:p>
-              <a:pPr algn="l">
-                <a:lnSpc>
-                  <a:spcPts val="2931"/>
-                </a:lnSpc>
-              </a:pPr>
-              <a:r>
-                <a:rPr lang="en-US" sz="2094">
-                  <a:solidFill>
-                    <a:srgbClr val="1A1A1A"/>
-                  </a:solidFill>
-                  <a:latin typeface="Times New Roman"/>
-                  <a:ea typeface="Times New Roman"/>
-                  <a:cs typeface="Times New Roman"/>
-                  <a:sym typeface="Times New Roman"/>
-                </a:rPr>
-                <a:t>1000</a:t>
-              </a:r>
-            </a:p>
-          </p:txBody>
-        </p:sp>
-        <p:sp>
-          <p:nvSpPr>
-            <p:cNvPr id="38" name="TextBox 38"/>
-            <p:cNvSpPr txBox="1"/>
-            <p:nvPr/>
-          </p:nvSpPr>
-          <p:spPr>
-            <a:xfrm>
-              <a:off x="2192872" y="7258089"/>
-              <a:ext cx="2832563" cy="524687"/>
-            </a:xfrm>
-            <a:prstGeom prst="rect">
-              <a:avLst/>
-            </a:prstGeom>
-          </p:spPr>
-          <p:txBody>
-            <a:bodyPr lIns="0" tIns="0" rIns="0" bIns="0" rtlCol="0" anchor="t">
-              <a:spAutoFit/>
-            </a:bodyPr>
-            <a:lstStyle/>
-            <a:p>
-              <a:pPr algn="l">
-                <a:lnSpc>
-                  <a:spcPts val="3283"/>
-                </a:lnSpc>
-              </a:pPr>
-              <a:r>
-                <a:rPr lang="en-US" sz="2345">
-                  <a:solidFill>
-                    <a:srgbClr val="1A1A1A"/>
-                  </a:solidFill>
-                  <a:latin typeface="Times New Roman"/>
-                  <a:ea typeface="Times New Roman"/>
-                  <a:cs typeface="Times New Roman"/>
-                  <a:sym typeface="Times New Roman"/>
-                </a:rPr>
-                <a:t>Training iteration</a:t>
-              </a:r>
-            </a:p>
-          </p:txBody>
-        </p:sp>
-        <p:sp>
-          <p:nvSpPr>
-            <p:cNvPr id="39" name="TextBox 39"/>
-            <p:cNvSpPr txBox="1"/>
-            <p:nvPr/>
-          </p:nvSpPr>
-          <p:spPr>
-            <a:xfrm>
-              <a:off x="9256843" y="7258089"/>
-              <a:ext cx="2832563" cy="524687"/>
-            </a:xfrm>
-            <a:prstGeom prst="rect">
-              <a:avLst/>
-            </a:prstGeom>
-          </p:spPr>
-          <p:txBody>
-            <a:bodyPr lIns="0" tIns="0" rIns="0" bIns="0" rtlCol="0" anchor="t">
-              <a:spAutoFit/>
-            </a:bodyPr>
-            <a:lstStyle/>
-            <a:p>
-              <a:pPr algn="l">
-                <a:lnSpc>
-                  <a:spcPts val="3283"/>
-                </a:lnSpc>
-              </a:pPr>
-              <a:r>
-                <a:rPr lang="en-US" sz="2345">
-                  <a:solidFill>
-                    <a:srgbClr val="1A1A1A"/>
-                  </a:solidFill>
-                  <a:latin typeface="Times New Roman"/>
-                  <a:ea typeface="Times New Roman"/>
-                  <a:cs typeface="Times New Roman"/>
-                  <a:sym typeface="Times New Roman"/>
-                </a:rPr>
-                <a:t>Training iteration</a:t>
-              </a:r>
-            </a:p>
-          </p:txBody>
-        </p:sp>
-        <p:sp>
-          <p:nvSpPr>
-            <p:cNvPr id="40" name="TextBox 40"/>
-            <p:cNvSpPr txBox="1"/>
-            <p:nvPr/>
-          </p:nvSpPr>
-          <p:spPr>
-            <a:xfrm>
-              <a:off x="16320815" y="7258089"/>
-              <a:ext cx="2832563" cy="524687"/>
-            </a:xfrm>
-            <a:prstGeom prst="rect">
-              <a:avLst/>
-            </a:prstGeom>
-          </p:spPr>
-          <p:txBody>
-            <a:bodyPr lIns="0" tIns="0" rIns="0" bIns="0" rtlCol="0" anchor="t">
-              <a:spAutoFit/>
-            </a:bodyPr>
-            <a:lstStyle/>
-            <a:p>
-              <a:pPr algn="l">
-                <a:lnSpc>
-                  <a:spcPts val="3283"/>
-                </a:lnSpc>
-              </a:pPr>
-              <a:r>
-                <a:rPr lang="en-US" sz="2345">
-                  <a:solidFill>
-                    <a:srgbClr val="1A1A1A"/>
-                  </a:solidFill>
-                  <a:latin typeface="Times New Roman"/>
-                  <a:ea typeface="Times New Roman"/>
-                  <a:cs typeface="Times New Roman"/>
-                  <a:sym typeface="Times New Roman"/>
-                </a:rPr>
-                <a:t>Training iteration</a:t>
-              </a:r>
-            </a:p>
-          </p:txBody>
-        </p:sp>
-        <p:sp>
-          <p:nvSpPr>
-            <p:cNvPr id="41" name="TextBox 41"/>
-            <p:cNvSpPr txBox="1"/>
-            <p:nvPr/>
-          </p:nvSpPr>
-          <p:spPr>
-            <a:xfrm rot="-5400000">
-              <a:off x="-1207162" y="3737786"/>
-              <a:ext cx="2824712" cy="524687"/>
-            </a:xfrm>
-            <a:prstGeom prst="rect">
-              <a:avLst/>
-            </a:prstGeom>
-          </p:spPr>
-          <p:txBody>
-            <a:bodyPr lIns="0" tIns="0" rIns="0" bIns="0" rtlCol="0" anchor="t">
-              <a:spAutoFit/>
-            </a:bodyPr>
-            <a:lstStyle/>
-            <a:p>
-              <a:pPr algn="l">
-                <a:lnSpc>
-                  <a:spcPts val="3283"/>
-                </a:lnSpc>
-              </a:pPr>
-              <a:r>
-                <a:rPr lang="en-US" sz="2345">
-                  <a:solidFill>
-                    <a:srgbClr val="1A1A1A"/>
-                  </a:solidFill>
-                  <a:latin typeface="Times New Roman"/>
-                  <a:ea typeface="Times New Roman"/>
-                  <a:cs typeface="Times New Roman"/>
-                  <a:sym typeface="Times New Roman"/>
-                </a:rPr>
-                <a:t>Cost contribution</a:t>
-              </a:r>
-            </a:p>
-          </p:txBody>
-        </p:sp>
-        <p:sp>
-          <p:nvSpPr>
-            <p:cNvPr id="42" name="TextBox 42"/>
-            <p:cNvSpPr txBox="1"/>
-            <p:nvPr/>
-          </p:nvSpPr>
-          <p:spPr>
-            <a:xfrm>
-              <a:off x="2345569" y="597941"/>
-              <a:ext cx="2519531" cy="567615"/>
-            </a:xfrm>
-            <a:prstGeom prst="rect">
-              <a:avLst/>
-            </a:prstGeom>
-          </p:spPr>
-          <p:txBody>
-            <a:bodyPr lIns="0" tIns="0" rIns="0" bIns="0" rtlCol="0" anchor="t">
-              <a:spAutoFit/>
-            </a:bodyPr>
-            <a:lstStyle/>
-            <a:p>
-              <a:pPr algn="l">
-                <a:lnSpc>
-                  <a:spcPts val="3518"/>
-                </a:lnSpc>
-              </a:pPr>
-              <a:r>
-                <a:rPr lang="en-US" sz="2512">
-                  <a:solidFill>
-                    <a:srgbClr val="1A1A1A"/>
-                  </a:solidFill>
-                  <a:latin typeface="Times New Roman"/>
-                  <a:ea typeface="Times New Roman"/>
-                  <a:cs typeface="Times New Roman"/>
-                  <a:sym typeface="Times New Roman"/>
-                </a:rPr>
-                <a:t>(a) Singularity</a:t>
-              </a:r>
-            </a:p>
-          </p:txBody>
-        </p:sp>
-        <p:sp>
-          <p:nvSpPr>
-            <p:cNvPr id="43" name="TextBox 43"/>
-            <p:cNvSpPr txBox="1"/>
-            <p:nvPr/>
-          </p:nvSpPr>
-          <p:spPr>
-            <a:xfrm>
-              <a:off x="9474027" y="597941"/>
-              <a:ext cx="2387578" cy="567615"/>
-            </a:xfrm>
-            <a:prstGeom prst="rect">
-              <a:avLst/>
-            </a:prstGeom>
-          </p:spPr>
-          <p:txBody>
-            <a:bodyPr lIns="0" tIns="0" rIns="0" bIns="0" rtlCol="0" anchor="t">
-              <a:spAutoFit/>
-            </a:bodyPr>
-            <a:lstStyle/>
-            <a:p>
-              <a:pPr algn="l">
-                <a:lnSpc>
-                  <a:spcPts val="3518"/>
-                </a:lnSpc>
-              </a:pPr>
-              <a:r>
-                <a:rPr lang="en-US" sz="2512">
-                  <a:solidFill>
-                    <a:srgbClr val="1A1A1A"/>
-                  </a:solidFill>
-                  <a:latin typeface="Times New Roman"/>
-                  <a:ea typeface="Times New Roman"/>
-                  <a:cs typeface="Times New Roman"/>
-                  <a:sym typeface="Times New Roman"/>
-                </a:rPr>
-                <a:t>(b) Joint limit</a:t>
-              </a:r>
-            </a:p>
-          </p:txBody>
-        </p:sp>
-        <p:sp>
-          <p:nvSpPr>
-            <p:cNvPr id="44" name="TextBox 44"/>
-            <p:cNvSpPr txBox="1"/>
-            <p:nvPr/>
-          </p:nvSpPr>
-          <p:spPr>
-            <a:xfrm>
-              <a:off x="16638825" y="597941"/>
-              <a:ext cx="2182287" cy="567615"/>
-            </a:xfrm>
-            <a:prstGeom prst="rect">
-              <a:avLst/>
-            </a:prstGeom>
-          </p:spPr>
-          <p:txBody>
-            <a:bodyPr lIns="0" tIns="0" rIns="0" bIns="0" rtlCol="0" anchor="t">
-              <a:spAutoFit/>
-            </a:bodyPr>
-            <a:lstStyle/>
-            <a:p>
-              <a:pPr algn="l">
-                <a:lnSpc>
-                  <a:spcPts val="3518"/>
-                </a:lnSpc>
-              </a:pPr>
-              <a:r>
-                <a:rPr lang="en-US" sz="2512">
-                  <a:solidFill>
-                    <a:srgbClr val="1A1A1A"/>
-                  </a:solidFill>
-                  <a:latin typeface="Times New Roman"/>
-                  <a:ea typeface="Times New Roman"/>
-                  <a:cs typeface="Times New Roman"/>
-                  <a:sym typeface="Times New Roman"/>
-                </a:rPr>
-                <a:t>(c) Collision</a:t>
-              </a:r>
-            </a:p>
-          </p:txBody>
-        </p:sp>
-        <p:sp>
-          <p:nvSpPr>
-            <p:cNvPr id="45" name="TextBox 45"/>
-            <p:cNvSpPr txBox="1"/>
-            <p:nvPr/>
-          </p:nvSpPr>
-          <p:spPr>
-            <a:xfrm>
-              <a:off x="6122929" y="-57150"/>
-              <a:ext cx="2092716" cy="457902"/>
-            </a:xfrm>
-            <a:prstGeom prst="rect">
-              <a:avLst/>
-            </a:prstGeom>
-          </p:spPr>
-          <p:txBody>
-            <a:bodyPr lIns="0" tIns="0" rIns="0" bIns="0" rtlCol="0" anchor="t">
-              <a:spAutoFit/>
-            </a:bodyPr>
-            <a:lstStyle/>
-            <a:p>
-              <a:pPr algn="l">
-                <a:lnSpc>
-                  <a:spcPts val="2814"/>
-                </a:lnSpc>
-              </a:pPr>
-              <a:r>
-                <a:rPr lang="en-US" sz="2010">
-                  <a:solidFill>
-                    <a:srgbClr val="1A1A1A"/>
-                  </a:solidFill>
-                  <a:latin typeface="Times New Roman"/>
-                  <a:ea typeface="Times New Roman"/>
-                  <a:cs typeface="Times New Roman"/>
-                  <a:sym typeface="Times New Roman"/>
-                </a:rPr>
-                <a:t>PPO (baseline)</a:t>
-              </a:r>
-            </a:p>
-          </p:txBody>
-        </p:sp>
-        <p:sp>
-          <p:nvSpPr>
-            <p:cNvPr id="46" name="TextBox 46"/>
-            <p:cNvSpPr txBox="1"/>
-            <p:nvPr/>
-          </p:nvSpPr>
-          <p:spPr>
-            <a:xfrm>
-              <a:off x="9808718" y="-57150"/>
-              <a:ext cx="1999315" cy="457902"/>
-            </a:xfrm>
-            <a:prstGeom prst="rect">
-              <a:avLst/>
-            </a:prstGeom>
-          </p:spPr>
-          <p:txBody>
-            <a:bodyPr lIns="0" tIns="0" rIns="0" bIns="0" rtlCol="0" anchor="t">
-              <a:spAutoFit/>
-            </a:bodyPr>
-            <a:lstStyle/>
-            <a:p>
-              <a:pPr algn="l">
-                <a:lnSpc>
-                  <a:spcPts val="2814"/>
-                </a:lnSpc>
-              </a:pPr>
-              <a:r>
-                <a:rPr lang="en-US" sz="2010">
-                  <a:solidFill>
-                    <a:srgbClr val="1A1A1A"/>
-                  </a:solidFill>
-                  <a:latin typeface="Times New Roman"/>
-                  <a:ea typeface="Times New Roman"/>
-                  <a:cs typeface="Times New Roman"/>
-                  <a:sym typeface="Times New Roman"/>
-                </a:rPr>
-                <a:t>cPPO (d = 25)</a:t>
-              </a:r>
-            </a:p>
-          </p:txBody>
-        </p:sp>
-        <p:sp>
-          <p:nvSpPr>
-            <p:cNvPr id="47" name="TextBox 47"/>
-            <p:cNvSpPr txBox="1"/>
-            <p:nvPr/>
-          </p:nvSpPr>
-          <p:spPr>
-            <a:xfrm>
-              <a:off x="13403191" y="-57150"/>
-              <a:ext cx="1999315" cy="457902"/>
-            </a:xfrm>
-            <a:prstGeom prst="rect">
-              <a:avLst/>
-            </a:prstGeom>
-          </p:spPr>
-          <p:txBody>
-            <a:bodyPr lIns="0" tIns="0" rIns="0" bIns="0" rtlCol="0" anchor="t">
-              <a:spAutoFit/>
-            </a:bodyPr>
-            <a:lstStyle/>
-            <a:p>
-              <a:pPr algn="l">
-                <a:lnSpc>
-                  <a:spcPts val="2814"/>
-                </a:lnSpc>
-              </a:pPr>
-              <a:r>
-                <a:rPr lang="en-US" sz="2010">
-                  <a:solidFill>
-                    <a:srgbClr val="1A1A1A"/>
-                  </a:solidFill>
-                  <a:latin typeface="Times New Roman"/>
-                  <a:ea typeface="Times New Roman"/>
-                  <a:cs typeface="Times New Roman"/>
-                  <a:sym typeface="Times New Roman"/>
-                </a:rPr>
-                <a:t>cPPO (d = 15)</a:t>
-              </a:r>
-            </a:p>
-          </p:txBody>
-        </p:sp>
-      </p:grpSp>
-      <p:grpSp>
-        <p:nvGrpSpPr>
           <p:cNvPr id="48" name="Group 48"/>
           <p:cNvGrpSpPr/>
           <p:nvPr/>
@@ -9603,6 +7760,42 @@
           </a:p>
         </p:txBody>
       </p:sp>
+      <p:pic>
+        <p:nvPicPr>
+          <p:cNvPr id="56" name="Picture 55">
+            <a:extLst>
+              <a:ext uri="{FF2B5EF4-FFF2-40B4-BE49-F238E27FC236}">
+                <a16:creationId xmlns:a16="http://schemas.microsoft.com/office/drawing/2014/main" id="{69A16F01-6981-4443-13CB-1B3193DFD982}"/>
+              </a:ext>
+            </a:extLst>
+          </p:cNvPr>
+          <p:cNvPicPr>
+            <a:picLocks noChangeAspect="1"/>
+          </p:cNvPicPr>
+          <p:nvPr/>
+        </p:nvPicPr>
+        <p:blipFill>
+          <a:blip r:embed="rId2" cstate="print">
+            <a:extLst>
+              <a:ext uri="{28A0092B-C50C-407E-A947-70E740481C1C}">
+                <a14:useLocalDpi xmlns:a14="http://schemas.microsoft.com/office/drawing/2010/main" val="0"/>
+              </a:ext>
+            </a:extLst>
+          </a:blip>
+          <a:stretch>
+            <a:fillRect/>
+          </a:stretch>
+        </p:blipFill>
+        <p:spPr>
+          <a:xfrm>
+            <a:off x="2095500" y="3848100"/>
+            <a:ext cx="14097000" cy="5546398"/>
+          </a:xfrm>
+          <a:prstGeom prst="rect">
+            <a:avLst/>
+          </a:prstGeom>
+        </p:spPr>
+      </p:pic>
     </p:spTree>
   </p:cSld>
   <p:clrMapOvr>
@@ -12710,7 +10903,7 @@
           <p:nvPr>
             <p:extLst>
               <p:ext uri="{D42A27DB-BD31-4B8C-83A1-F6EECF244321}">
-                <p14:modId xmlns:p14="http://schemas.microsoft.com/office/powerpoint/2010/main" val="2254476797"/>
+                <p14:modId xmlns:p14="http://schemas.microsoft.com/office/powerpoint/2010/main" val="889403086"/>
               </p:ext>
             </p:extLst>
           </p:nvPr>
@@ -12790,12 +10983,44 @@
                         <a:buNone/>
                       </a:pPr>
                       <a:r>
-                        <a:rPr lang="en-GB" sz="2800" b="1">
+                        <a:rPr lang="en-GB" sz="2800" b="1" dirty="0">
+                          <a:solidFill>
+                            <a:schemeClr val="bg1"/>
+                          </a:solidFill>
                           <a:latin typeface="Times New Roman" panose="02020603050405020304" pitchFamily="18" charset="0"/>
                           <a:cs typeface="Times New Roman" panose="02020603050405020304" pitchFamily="18" charset="0"/>
                         </a:rPr>
                         <a:t>Khan et al.</a:t>
                       </a:r>
+                      <a:r>
+                        <a:rPr lang="en-FI" sz="2800" b="1" dirty="0">
+                          <a:solidFill>
+                            <a:schemeClr val="bg1"/>
+                          </a:solidFill>
+                          <a:latin typeface="Times New Roman" panose="02020603050405020304" pitchFamily="18" charset="0"/>
+                          <a:cs typeface="Times New Roman" panose="02020603050405020304" pitchFamily="18" charset="0"/>
+                        </a:rPr>
+                        <a:t> </a:t>
+                      </a:r>
+                      <a:r>
+                        <a:rPr lang="en-US" sz="2800" dirty="0">
+                          <a:solidFill>
+                            <a:schemeClr val="bg1"/>
+                          </a:solidFill>
+                          <a:latin typeface="Times New Roman"/>
+                          <a:ea typeface="Times New Roman"/>
+                          <a:cs typeface="Times New Roman"/>
+                          <a:sym typeface="Times New Roman"/>
+                        </a:rPr>
+                        <a:t>[8] </a:t>
+                      </a:r>
+                      <a:endParaRPr lang="en-GB" sz="2800" b="1" dirty="0">
+                        <a:solidFill>
+                          <a:schemeClr val="bg1"/>
+                        </a:solidFill>
+                        <a:latin typeface="Times New Roman" panose="02020603050405020304" pitchFamily="18" charset="0"/>
+                        <a:cs typeface="Times New Roman" panose="02020603050405020304" pitchFamily="18" charset="0"/>
+                      </a:endParaRPr>
                     </a:p>
                   </a:txBody>
                   <a:tcPr anchor="ctr"/>
@@ -12812,12 +11037,58 @@
                         <a:buNone/>
                       </a:pPr>
                       <a:r>
-                        <a:rPr lang="en-GB" sz="2800" b="1">
+                        <a:rPr lang="en-GB" sz="2800" b="1" dirty="0">
+                          <a:solidFill>
+                            <a:schemeClr val="bg1"/>
+                          </a:solidFill>
                           <a:latin typeface="Times New Roman" panose="02020603050405020304" pitchFamily="18" charset="0"/>
                           <a:cs typeface="Times New Roman" panose="02020603050405020304" pitchFamily="18" charset="0"/>
                         </a:rPr>
                         <a:t>Shen et al.</a:t>
                       </a:r>
+                      <a:r>
+                        <a:rPr lang="en-US" sz="2800" dirty="0">
+                          <a:solidFill>
+                            <a:schemeClr val="bg1"/>
+                          </a:solidFill>
+                          <a:latin typeface="Times New Roman"/>
+                          <a:ea typeface="Times New Roman"/>
+                          <a:cs typeface="Times New Roman"/>
+                          <a:sym typeface="Times New Roman"/>
+                        </a:rPr>
+                        <a:t> [</a:t>
+                      </a:r>
+                      <a:r>
+                        <a:rPr lang="en-FI" sz="2800" dirty="0">
+                          <a:solidFill>
+                            <a:schemeClr val="bg1"/>
+                          </a:solidFill>
+                          <a:latin typeface="Times New Roman"/>
+                          <a:ea typeface="Times New Roman"/>
+                          <a:cs typeface="Times New Roman"/>
+                          <a:sym typeface="Times New Roman"/>
+                        </a:rPr>
+                        <a:t>9</a:t>
+                      </a:r>
+                      <a:r>
+                        <a:rPr lang="en-US" sz="2800" dirty="0">
+                          <a:solidFill>
+                            <a:schemeClr val="bg1"/>
+                          </a:solidFill>
+                          <a:latin typeface="Times New Roman"/>
+                          <a:ea typeface="Times New Roman"/>
+                          <a:cs typeface="Times New Roman"/>
+                          <a:sym typeface="Times New Roman"/>
+                        </a:rPr>
+                        <a:t>] </a:t>
+                      </a:r>
+                      <a:endParaRPr lang="en-GB" sz="2800" b="1" dirty="0">
+                        <a:solidFill>
+                          <a:schemeClr val="bg1"/>
+                        </a:solidFill>
+                        <a:latin typeface="Times New Roman" panose="02020603050405020304" pitchFamily="18" charset="0"/>
+                        <a:cs typeface="Times New Roman" panose="02020603050405020304" pitchFamily="18" charset="0"/>
+                      </a:endParaRPr>
                     </a:p>
                   </a:txBody>
                   <a:tcPr anchor="ctr"/>
@@ -17853,13 +16124,13 @@
   <p:clrMapOvr>
     <a:masterClrMapping/>
   </p:clrMapOvr>
-  <mc:AlternateContent xmlns:mc="http://schemas.openxmlformats.org/markup-compatibility/2006">
-    <mc:Choice xmlns:p159="http://schemas.microsoft.com/office/powerpoint/2015/09/main" Requires="p159">
+  <mc:AlternateContent xmlns:mc="http://schemas.openxmlformats.org/markup-compatibility/2006" xmlns:p159="http://schemas.microsoft.com/office/powerpoint/2015/09/main">
+    <mc:Choice Requires="p159">
       <p:transition xmlns:p14="http://schemas.microsoft.com/office/powerpoint/2010/main" spd="slow" p14:dur="1250">
         <p159:morph option="byObject"/>
       </p:transition>
     </mc:Choice>
-    <mc:Fallback>
+    <mc:Fallback xmlns="">
       <p:transition spd="slow">
         <p:fade/>
       </p:transition>
